--- a/ゲーム科1年/00_前期/ゲームプログラミングⅡ/05_シューティングゲーム制作.pptx
+++ b/ゲーム科1年/00_前期/ゲームプログラミングⅡ/05_シューティングゲーム制作.pptx
@@ -7,8 +7,8 @@
   <p:sldIdLst>
     <p:sldId id="256" r:id="rId2"/>
     <p:sldId id="257" r:id="rId3"/>
-    <p:sldId id="258" r:id="rId4"/>
-    <p:sldId id="259" r:id="rId5"/>
+    <p:sldId id="259" r:id="rId4"/>
+    <p:sldId id="260" r:id="rId5"/>
   </p:sldIdLst>
   <p:sldSz cx="12192000" cy="6858000"/>
   <p:notesSz cx="6858000" cy="9144000"/>
@@ -262,7 +262,7 @@
           <a:p>
             <a:fld id="{E9CC885B-4903-4D54-9A93-00025F12DED9}" type="datetimeFigureOut">
               <a:rPr kumimoji="1" lang="ja-JP" altLang="en-US" smtClean="0"/>
-              <a:t>2024/9/13</a:t>
+              <a:t>2026/5/20</a:t>
             </a:fld>
             <a:endParaRPr kumimoji="1" lang="ja-JP" altLang="en-US"/>
           </a:p>
@@ -492,7 +492,7 @@
           <a:p>
             <a:fld id="{E9CC885B-4903-4D54-9A93-00025F12DED9}" type="datetimeFigureOut">
               <a:rPr kumimoji="1" lang="ja-JP" altLang="en-US" smtClean="0"/>
-              <a:t>2024/9/13</a:t>
+              <a:t>2026/5/20</a:t>
             </a:fld>
             <a:endParaRPr kumimoji="1" lang="ja-JP" altLang="en-US"/>
           </a:p>
@@ -732,7 +732,7 @@
           <a:p>
             <a:fld id="{E9CC885B-4903-4D54-9A93-00025F12DED9}" type="datetimeFigureOut">
               <a:rPr kumimoji="1" lang="ja-JP" altLang="en-US" smtClean="0"/>
-              <a:t>2024/9/13</a:t>
+              <a:t>2026/5/20</a:t>
             </a:fld>
             <a:endParaRPr kumimoji="1" lang="ja-JP" altLang="en-US"/>
           </a:p>
@@ -962,7 +962,7 @@
           <a:p>
             <a:fld id="{E9CC885B-4903-4D54-9A93-00025F12DED9}" type="datetimeFigureOut">
               <a:rPr kumimoji="1" lang="ja-JP" altLang="en-US" smtClean="0"/>
-              <a:t>2024/9/13</a:t>
+              <a:t>2026/5/20</a:t>
             </a:fld>
             <a:endParaRPr kumimoji="1" lang="ja-JP" altLang="en-US"/>
           </a:p>
@@ -1237,7 +1237,7 @@
           <a:p>
             <a:fld id="{E9CC885B-4903-4D54-9A93-00025F12DED9}" type="datetimeFigureOut">
               <a:rPr kumimoji="1" lang="ja-JP" altLang="en-US" smtClean="0"/>
-              <a:t>2024/9/13</a:t>
+              <a:t>2026/5/20</a:t>
             </a:fld>
             <a:endParaRPr kumimoji="1" lang="ja-JP" altLang="en-US"/>
           </a:p>
@@ -1566,7 +1566,7 @@
           <a:p>
             <a:fld id="{E9CC885B-4903-4D54-9A93-00025F12DED9}" type="datetimeFigureOut">
               <a:rPr kumimoji="1" lang="ja-JP" altLang="en-US" smtClean="0"/>
-              <a:t>2024/9/13</a:t>
+              <a:t>2026/5/20</a:t>
             </a:fld>
             <a:endParaRPr kumimoji="1" lang="ja-JP" altLang="en-US"/>
           </a:p>
@@ -2042,7 +2042,7 @@
           <a:p>
             <a:fld id="{E9CC885B-4903-4D54-9A93-00025F12DED9}" type="datetimeFigureOut">
               <a:rPr kumimoji="1" lang="ja-JP" altLang="en-US" smtClean="0"/>
-              <a:t>2024/9/13</a:t>
+              <a:t>2026/5/20</a:t>
             </a:fld>
             <a:endParaRPr kumimoji="1" lang="ja-JP" altLang="en-US"/>
           </a:p>
@@ -2183,7 +2183,7 @@
           <a:p>
             <a:fld id="{E9CC885B-4903-4D54-9A93-00025F12DED9}" type="datetimeFigureOut">
               <a:rPr kumimoji="1" lang="ja-JP" altLang="en-US" smtClean="0"/>
-              <a:t>2024/9/13</a:t>
+              <a:t>2026/5/20</a:t>
             </a:fld>
             <a:endParaRPr kumimoji="1" lang="ja-JP" altLang="en-US"/>
           </a:p>
@@ -2296,7 +2296,7 @@
           <a:p>
             <a:fld id="{E9CC885B-4903-4D54-9A93-00025F12DED9}" type="datetimeFigureOut">
               <a:rPr kumimoji="1" lang="ja-JP" altLang="en-US" smtClean="0"/>
-              <a:t>2024/9/13</a:t>
+              <a:t>2026/5/20</a:t>
             </a:fld>
             <a:endParaRPr kumimoji="1" lang="ja-JP" altLang="en-US"/>
           </a:p>
@@ -2639,7 +2639,7 @@
           <a:p>
             <a:fld id="{E9CC885B-4903-4D54-9A93-00025F12DED9}" type="datetimeFigureOut">
               <a:rPr kumimoji="1" lang="ja-JP" altLang="en-US" smtClean="0"/>
-              <a:t>2024/9/13</a:t>
+              <a:t>2026/5/20</a:t>
             </a:fld>
             <a:endParaRPr kumimoji="1" lang="ja-JP" altLang="en-US"/>
           </a:p>
@@ -2927,7 +2927,7 @@
           <a:p>
             <a:fld id="{E9CC885B-4903-4D54-9A93-00025F12DED9}" type="datetimeFigureOut">
               <a:rPr kumimoji="1" lang="ja-JP" altLang="en-US" smtClean="0"/>
-              <a:t>2024/9/13</a:t>
+              <a:t>2026/5/20</a:t>
             </a:fld>
             <a:endParaRPr kumimoji="1" lang="ja-JP" altLang="en-US"/>
           </a:p>
@@ -3200,7 +3200,7 @@
           <a:p>
             <a:fld id="{E9CC885B-4903-4D54-9A93-00025F12DED9}" type="datetimeFigureOut">
               <a:rPr kumimoji="1" lang="ja-JP" altLang="en-US" smtClean="0"/>
-              <a:t>2024/9/13</a:t>
+              <a:t>2026/5/20</a:t>
             </a:fld>
             <a:endParaRPr kumimoji="1" lang="ja-JP" altLang="en-US"/>
           </a:p>
@@ -3667,7 +3667,7 @@
         <p:spPr>
           <a:xfrm>
             <a:off x="567542" y="1216429"/>
-            <a:ext cx="9110186" cy="4524315"/>
+            <a:ext cx="9110186" cy="4154984"/>
           </a:xfrm>
           <a:prstGeom prst="rect">
             <a:avLst/>
@@ -3703,12 +3703,12 @@
               <a:t>ゲームプログラミング</a:t>
             </a:r>
             <a:r>
-              <a:rPr kumimoji="1" lang="en-US" altLang="ja-JP" sz="2400" b="1" dirty="0">
+              <a:rPr lang="en-US" altLang="ja-JP" sz="2400" b="1" dirty="0">
                 <a:solidFill>
                   <a:srgbClr val="FF0000"/>
                 </a:solidFill>
               </a:rPr>
-              <a:t>Ⅰ</a:t>
+              <a:t>Ⅱ</a:t>
             </a:r>
             <a:r>
               <a:rPr kumimoji="1" lang="ja-JP" altLang="en-US" sz="2400" b="1" dirty="0">
@@ -3792,16 +3792,9 @@
           <a:p>
             <a:r>
               <a:rPr lang="ja-JP" altLang="en-US" sz="2400" dirty="0"/>
-              <a:t>・サンプルをコピーしないこと</a:t>
+              <a:t>・サンプルをコピペしないこと</a:t>
             </a:r>
             <a:endParaRPr lang="en-US" altLang="ja-JP" sz="2400" dirty="0"/>
-          </a:p>
-          <a:p>
-            <a:r>
-              <a:rPr kumimoji="1" lang="ja-JP" altLang="en-US" sz="2400" dirty="0"/>
-              <a:t>　（理解したうえで手打ちでプログラムを書くこと）</a:t>
-            </a:r>
-            <a:endParaRPr kumimoji="1" lang="en-US" altLang="ja-JP" sz="2400" dirty="0"/>
           </a:p>
         </p:txBody>
       </p:sp>
@@ -3885,7 +3878,7 @@
         <p:spPr>
           <a:xfrm>
             <a:off x="567542" y="1216429"/>
-            <a:ext cx="10512814" cy="5262979"/>
+            <a:ext cx="7127272" cy="3046988"/>
           </a:xfrm>
           <a:prstGeom prst="rect">
             <a:avLst/>
@@ -3933,7 +3926,7 @@
                   <a:srgbClr val="FF0000"/>
                 </a:solidFill>
               </a:rPr>
-              <a:t>■ゲーム全般について</a:t>
+              <a:t>■最低限実装すること</a:t>
             </a:r>
             <a:endParaRPr lang="en-US" altLang="ja-JP" sz="2400" b="1" dirty="0">
               <a:solidFill>
@@ -3959,30 +3952,7 @@
           <a:p>
             <a:r>
               <a:rPr kumimoji="1" lang="ja-JP" altLang="en-US" sz="2400" dirty="0"/>
-              <a:t>・タイトル、プレイ、ゲームオーバー、ゲームクリアの</a:t>
-            </a:r>
-            <a:r>
-              <a:rPr kumimoji="1" lang="en-US" altLang="ja-JP" sz="2400" dirty="0"/>
-              <a:t>4</a:t>
-            </a:r>
-            <a:r>
-              <a:rPr kumimoji="1" lang="ja-JP" altLang="en-US" sz="2400" dirty="0"/>
-              <a:t>つの画面がある。</a:t>
-            </a:r>
-            <a:endParaRPr kumimoji="1" lang="en-US" altLang="ja-JP" sz="2400" dirty="0"/>
-          </a:p>
-          <a:p>
-            <a:r>
-              <a:rPr kumimoji="1" lang="ja-JP" altLang="en-US" sz="2400" dirty="0"/>
-              <a:t>・上記の</a:t>
-            </a:r>
-            <a:r>
-              <a:rPr kumimoji="1" lang="en-US" altLang="ja-JP" sz="2400" dirty="0"/>
-              <a:t>4</a:t>
-            </a:r>
-            <a:r>
-              <a:rPr kumimoji="1" lang="ja-JP" altLang="en-US" sz="2400" dirty="0"/>
-              <a:t>画面が正しく遷移する。</a:t>
+              <a:t>・画面遷移がある。</a:t>
             </a:r>
             <a:endParaRPr kumimoji="1" lang="en-US" altLang="ja-JP" sz="2400" dirty="0"/>
           </a:p>
@@ -4015,45 +3985,6 @@
               <a:t>か所でも自作の画像が使用されている。</a:t>
             </a:r>
             <a:endParaRPr lang="en-US" altLang="ja-JP" sz="2400" dirty="0"/>
-          </a:p>
-          <a:p>
-            <a:endParaRPr kumimoji="1" lang="en-US" altLang="ja-JP" sz="2400" dirty="0"/>
-          </a:p>
-          <a:p>
-            <a:r>
-              <a:rPr lang="ja-JP" altLang="en-US" sz="2400" b="1" dirty="0">
-                <a:solidFill>
-                  <a:srgbClr val="FF0000"/>
-                </a:solidFill>
-              </a:rPr>
-              <a:t>■プレイヤーについて</a:t>
-            </a:r>
-            <a:endParaRPr lang="en-US" altLang="ja-JP" sz="2400" b="1" dirty="0">
-              <a:solidFill>
-                <a:srgbClr val="FF0000"/>
-              </a:solidFill>
-            </a:endParaRPr>
-          </a:p>
-          <a:p>
-            <a:r>
-              <a:rPr kumimoji="1" lang="ja-JP" altLang="en-US" sz="2400" dirty="0"/>
-              <a:t>・キー入力に対応した移動がある。</a:t>
-            </a:r>
-            <a:endParaRPr kumimoji="1" lang="en-US" altLang="ja-JP" sz="2400" dirty="0"/>
-          </a:p>
-          <a:p>
-            <a:r>
-              <a:rPr lang="ja-JP" altLang="en-US" sz="2400" dirty="0"/>
-              <a:t>・任意のキーを押すと弾丸が発射される。</a:t>
-            </a:r>
-            <a:endParaRPr lang="en-US" altLang="ja-JP" sz="2400" dirty="0"/>
-          </a:p>
-          <a:p>
-            <a:r>
-              <a:rPr kumimoji="1" lang="ja-JP" altLang="en-US" sz="2400" dirty="0"/>
-              <a:t>・任意の条件で死亡する。</a:t>
-            </a:r>
-            <a:endParaRPr kumimoji="1" lang="en-US" altLang="ja-JP" sz="2400" dirty="0"/>
           </a:p>
         </p:txBody>
       </p:sp>
@@ -4137,7 +4068,7 @@
         <p:spPr>
           <a:xfrm>
             <a:off x="567542" y="1216429"/>
-            <a:ext cx="8802410" cy="3785652"/>
+            <a:ext cx="9110186" cy="5632311"/>
           </a:xfrm>
           <a:prstGeom prst="rect">
             <a:avLst/>
@@ -4152,94 +4083,21 @@
           <a:p>
             <a:r>
               <a:rPr kumimoji="1" lang="ja-JP" altLang="en-US" sz="2400" dirty="0"/>
-              <a:t>最低限の実装つづき</a:t>
+              <a:t>以下は加点要素になります。</a:t>
             </a:r>
             <a:endParaRPr kumimoji="1" lang="en-US" altLang="ja-JP" sz="2400" dirty="0"/>
           </a:p>
           <a:p>
-            <a:endParaRPr kumimoji="1" lang="en-US" altLang="ja-JP" sz="2400" dirty="0"/>
-          </a:p>
-          <a:p>
-            <a:r>
-              <a:rPr lang="ja-JP" altLang="en-US" sz="2400" b="1" dirty="0">
-                <a:solidFill>
-                  <a:srgbClr val="FF0000"/>
-                </a:solidFill>
-              </a:rPr>
-              <a:t>■敵について</a:t>
-            </a:r>
-            <a:endParaRPr lang="en-US" altLang="ja-JP" sz="2400" b="1" dirty="0">
-              <a:solidFill>
-                <a:srgbClr val="FF0000"/>
-              </a:solidFill>
-            </a:endParaRPr>
-          </a:p>
-          <a:p>
-            <a:r>
-              <a:rPr lang="ja-JP" altLang="en-US" sz="2400" dirty="0"/>
-              <a:t>・</a:t>
-            </a:r>
-            <a:r>
-              <a:rPr lang="en-US" altLang="ja-JP" sz="2400" dirty="0"/>
-              <a:t>2</a:t>
-            </a:r>
-            <a:r>
-              <a:rPr lang="ja-JP" altLang="en-US" sz="2400" dirty="0"/>
-              <a:t>体以上出現させる</a:t>
-            </a:r>
             <a:endParaRPr lang="en-US" altLang="ja-JP" sz="2400" dirty="0"/>
           </a:p>
           <a:p>
-            <a:r>
-              <a:rPr kumimoji="1" lang="ja-JP" altLang="en-US" sz="2400" dirty="0"/>
-              <a:t>・プレイヤーを攻撃する手段がある（体当たりなどでも可）</a:t>
-            </a:r>
-            <a:endParaRPr kumimoji="1" lang="en-US" altLang="ja-JP" sz="2400" dirty="0"/>
-          </a:p>
-          <a:p>
-            <a:endParaRPr kumimoji="1" lang="en-US" altLang="ja-JP" sz="2400" dirty="0"/>
-          </a:p>
-          <a:p>
-            <a:r>
-              <a:rPr lang="ja-JP" altLang="en-US" sz="2400" b="1" dirty="0">
-                <a:solidFill>
-                  <a:srgbClr val="FF0000"/>
-                </a:solidFill>
-              </a:rPr>
-              <a:t>■弾丸について</a:t>
-            </a:r>
-            <a:endParaRPr lang="en-US" altLang="ja-JP" sz="2400" b="1" dirty="0">
-              <a:solidFill>
-                <a:srgbClr val="FF0000"/>
-              </a:solidFill>
-            </a:endParaRPr>
-          </a:p>
-          <a:p>
-            <a:r>
-              <a:rPr kumimoji="1" lang="ja-JP" altLang="en-US" sz="2400" dirty="0"/>
-              <a:t>・画面に複数存在しても問題なく挙動する</a:t>
-            </a:r>
-            <a:endParaRPr kumimoji="1" lang="en-US" altLang="ja-JP" sz="2400" dirty="0"/>
-          </a:p>
-          <a:p>
-            <a:endParaRPr lang="en-US" altLang="ja-JP" sz="2400" dirty="0"/>
-          </a:p>
-          <a:p>
-            <a:r>
-              <a:rPr kumimoji="1" lang="en-US" altLang="ja-JP" sz="2400" b="1" dirty="0">
-                <a:solidFill>
-                  <a:srgbClr val="FF0000"/>
-                </a:solidFill>
-              </a:rPr>
-              <a:t>※</a:t>
-            </a:r>
             <a:r>
               <a:rPr kumimoji="1" lang="ja-JP" altLang="en-US" sz="2400" b="1" dirty="0">
                 <a:solidFill>
                   <a:srgbClr val="FF0000"/>
                 </a:solidFill>
               </a:rPr>
-              <a:t>必ず提出前に、条件を満たしているか確認しましょう！！</a:t>
+              <a:t>■サンプルをよく分析すると実装できるもの</a:t>
             </a:r>
             <a:endParaRPr kumimoji="1" lang="en-US" altLang="ja-JP" sz="2400" b="1" dirty="0">
               <a:solidFill>
@@ -4247,12 +4105,116 @@
               </a:solidFill>
             </a:endParaRPr>
           </a:p>
+          <a:p>
+            <a:r>
+              <a:rPr kumimoji="1" lang="ja-JP" altLang="en-US" sz="2400" dirty="0"/>
+              <a:t>・複数背景（近景と遠景）</a:t>
+            </a:r>
+            <a:endParaRPr kumimoji="1" lang="en-US" altLang="ja-JP" sz="2400" dirty="0"/>
+          </a:p>
+          <a:p>
+            <a:r>
+              <a:rPr lang="ja-JP" altLang="en-US" sz="2400" dirty="0"/>
+              <a:t>・プレイ時間表示</a:t>
+            </a:r>
+            <a:endParaRPr lang="en-US" altLang="ja-JP" sz="2400" dirty="0"/>
+          </a:p>
+          <a:p>
+            <a:r>
+              <a:rPr lang="ja-JP" altLang="en-US" sz="2400" dirty="0"/>
+              <a:t>・プレイヤーに</a:t>
+            </a:r>
+            <a:r>
+              <a:rPr lang="en-US" altLang="ja-JP" sz="2400" dirty="0"/>
+              <a:t>HP</a:t>
+            </a:r>
+            <a:r>
+              <a:rPr lang="ja-JP" altLang="en-US" sz="2400" dirty="0"/>
+              <a:t>制度</a:t>
+            </a:r>
+            <a:endParaRPr lang="en-US" altLang="ja-JP" sz="2400" dirty="0"/>
+          </a:p>
+          <a:p>
+            <a:endParaRPr lang="en-US" altLang="ja-JP" sz="2400" dirty="0"/>
+          </a:p>
+          <a:p>
+            <a:r>
+              <a:rPr kumimoji="1" lang="ja-JP" altLang="en-US" sz="2400" b="1" dirty="0">
+                <a:solidFill>
+                  <a:srgbClr val="FF0000"/>
+                </a:solidFill>
+              </a:rPr>
+              <a:t>■サンプルにない実装がある</a:t>
+            </a:r>
+            <a:endParaRPr kumimoji="1" lang="en-US" altLang="ja-JP" sz="2400" b="1" dirty="0">
+              <a:solidFill>
+                <a:srgbClr val="FF0000"/>
+              </a:solidFill>
+            </a:endParaRPr>
+          </a:p>
+          <a:p>
+            <a:r>
+              <a:rPr lang="ja-JP" altLang="en-US" sz="2400" dirty="0"/>
+              <a:t>・チャージショット</a:t>
+            </a:r>
+            <a:endParaRPr lang="en-US" altLang="ja-JP" sz="2400" dirty="0"/>
+          </a:p>
+          <a:p>
+            <a:r>
+              <a:rPr kumimoji="1" lang="ja-JP" altLang="en-US" sz="2400" dirty="0"/>
+              <a:t>・ホーミング弾</a:t>
+            </a:r>
+            <a:endParaRPr kumimoji="1" lang="en-US" altLang="ja-JP" sz="2400" dirty="0"/>
+          </a:p>
+          <a:p>
+            <a:r>
+              <a:rPr lang="ja-JP" altLang="en-US" sz="2400" dirty="0"/>
+              <a:t>・貫通弾</a:t>
+            </a:r>
+            <a:endParaRPr lang="en-US" altLang="ja-JP" sz="2400" dirty="0"/>
+          </a:p>
+          <a:p>
+            <a:r>
+              <a:rPr lang="ja-JP" altLang="en-US" sz="2400" dirty="0"/>
+              <a:t>・３</a:t>
+            </a:r>
+            <a:r>
+              <a:rPr lang="en-US" altLang="ja-JP" sz="2400" dirty="0"/>
+              <a:t>Way</a:t>
+            </a:r>
+            <a:r>
+              <a:rPr lang="ja-JP" altLang="en-US" sz="2400" dirty="0"/>
+              <a:t>ショット</a:t>
+            </a:r>
+            <a:endParaRPr kumimoji="1" lang="en-US" altLang="ja-JP" sz="2400" dirty="0"/>
+          </a:p>
+          <a:p>
+            <a:r>
+              <a:rPr lang="ja-JP" altLang="en-US" sz="2400" dirty="0"/>
+              <a:t>・サンプルにない動きをする敵（新種の敵、ボスなど）</a:t>
+            </a:r>
+            <a:endParaRPr lang="en-US" altLang="ja-JP" sz="2400" dirty="0"/>
+          </a:p>
+          <a:p>
+            <a:r>
+              <a:rPr kumimoji="1" lang="ja-JP" altLang="en-US" sz="2400" dirty="0"/>
+              <a:t>・ハイスコアのセーブ（ゲームを終了してもリセットされない）</a:t>
+            </a:r>
+            <a:endParaRPr kumimoji="1" lang="en-US" altLang="ja-JP" sz="2400" dirty="0"/>
+          </a:p>
+          <a:p>
+            <a:r>
+              <a:rPr lang="ja-JP" altLang="en-US" sz="2400" dirty="0"/>
+              <a:t>など</a:t>
+            </a:r>
+            <a:endParaRPr kumimoji="1" lang="en-US" altLang="ja-JP" sz="2400" dirty="0"/>
+          </a:p>
         </p:txBody>
       </p:sp>
     </p:spTree>
     <p:extLst>
       <p:ext uri="{BB962C8B-B14F-4D97-AF65-F5344CB8AC3E}">
-        <p14:creationId xmlns:p14="http://schemas.microsoft.com/office/powerpoint/2010/main" val="564510326"/>
+        <p14:creationId xmlns:p14="http://schemas.microsoft.com/office/powerpoint/2010/main" val="2556909716"/>
       </p:ext>
     </p:extLst>
   </p:cSld>
@@ -4329,7 +4291,7 @@
         <p:spPr>
           <a:xfrm>
             <a:off x="567542" y="1216429"/>
-            <a:ext cx="9110186" cy="5632311"/>
+            <a:ext cx="10649069" cy="3785652"/>
           </a:xfrm>
           <a:prstGeom prst="rect">
             <a:avLst/>
@@ -4344,21 +4306,76 @@
           <a:p>
             <a:r>
               <a:rPr kumimoji="1" lang="ja-JP" altLang="en-US" sz="2400" dirty="0"/>
-              <a:t>以下は加点要素になります。</a:t>
-            </a:r>
-            <a:endParaRPr kumimoji="1" lang="en-US" altLang="ja-JP" sz="2400" dirty="0"/>
-          </a:p>
-          <a:p>
-            <a:endParaRPr lang="en-US" altLang="ja-JP" sz="2400" dirty="0"/>
-          </a:p>
-          <a:p>
+              <a:t>８月には</a:t>
+            </a:r>
             <a:r>
               <a:rPr kumimoji="1" lang="ja-JP" altLang="en-US" sz="2400" b="1" dirty="0">
                 <a:solidFill>
                   <a:srgbClr val="FF0000"/>
                 </a:solidFill>
               </a:rPr>
-              <a:t>■サンプルをよく分析すると実装できるもの</a:t>
+              <a:t>九州学生ゲーム大祭</a:t>
+            </a:r>
+            <a:r>
+              <a:rPr kumimoji="1" lang="ja-JP" altLang="en-US" sz="2400" dirty="0"/>
+              <a:t>という、</a:t>
+            </a:r>
+            <a:r>
+              <a:rPr lang="ja-JP" altLang="en-US" sz="2400" dirty="0"/>
+              <a:t>学生作品の展示イベントがあります。</a:t>
+            </a:r>
+            <a:endParaRPr lang="en-US" altLang="ja-JP" sz="2400" dirty="0"/>
+          </a:p>
+          <a:p>
+            <a:r>
+              <a:rPr kumimoji="1" lang="ja-JP" altLang="en-US" sz="2400" dirty="0"/>
+              <a:t>数少ないイベント参加のチャンスですので、</a:t>
+            </a:r>
+            <a:endParaRPr kumimoji="1" lang="en-US" altLang="ja-JP" sz="2400" dirty="0"/>
+          </a:p>
+          <a:p>
+            <a:r>
+              <a:rPr lang="ja-JP" altLang="en-US" sz="2400" dirty="0"/>
+              <a:t>ぜひ展示まで狙ってみましょう。</a:t>
+            </a:r>
+            <a:endParaRPr lang="en-US" altLang="ja-JP" sz="2400" dirty="0"/>
+          </a:p>
+          <a:p>
+            <a:endParaRPr kumimoji="1" lang="en-US" altLang="ja-JP" sz="2400" dirty="0"/>
+          </a:p>
+          <a:p>
+            <a:r>
+              <a:rPr lang="ja-JP" altLang="en-US" sz="2400" dirty="0"/>
+              <a:t>このようなイベントでの展示は、</a:t>
+            </a:r>
+            <a:endParaRPr lang="en-US" altLang="ja-JP" sz="2400" dirty="0"/>
+          </a:p>
+          <a:p>
+            <a:r>
+              <a:rPr kumimoji="1" lang="ja-JP" altLang="en-US" sz="2400" b="1" dirty="0">
+                <a:solidFill>
+                  <a:srgbClr val="FF0000"/>
+                </a:solidFill>
+              </a:rPr>
+              <a:t>将来の就職活動でとても大きなアドバンテージ</a:t>
+            </a:r>
+            <a:r>
+              <a:rPr kumimoji="1" lang="ja-JP" altLang="en-US" sz="2400" dirty="0"/>
+              <a:t>となります。</a:t>
+            </a:r>
+            <a:endParaRPr kumimoji="1" lang="en-US" altLang="ja-JP" sz="2400" dirty="0"/>
+          </a:p>
+          <a:p>
+            <a:endParaRPr lang="en-US" altLang="ja-JP" sz="2400" dirty="0"/>
+          </a:p>
+          <a:p>
+            <a:r>
+              <a:rPr kumimoji="1" lang="ja-JP" altLang="en-US" sz="2400" b="1" dirty="0">
+                <a:solidFill>
+                  <a:srgbClr val="FF0000"/>
+                </a:solidFill>
+              </a:rPr>
+              <a:t>■注意</a:t>
             </a:r>
             <a:endParaRPr kumimoji="1" lang="en-US" altLang="ja-JP" sz="2400" b="1" dirty="0">
               <a:solidFill>
@@ -4368,105 +4385,15 @@
           </a:p>
           <a:p>
             <a:r>
+              <a:rPr lang="ja-JP" altLang="en-US" sz="2400" dirty="0"/>
+              <a:t>イベントには他校の学生や企業の方も多数参加されます。</a:t>
+            </a:r>
+            <a:endParaRPr lang="en-US" altLang="ja-JP" sz="2400" dirty="0"/>
+          </a:p>
+          <a:p>
+            <a:r>
               <a:rPr kumimoji="1" lang="ja-JP" altLang="en-US" sz="2400" dirty="0"/>
-              <a:t>・複数背景（近景と遠景）</a:t>
-            </a:r>
-            <a:endParaRPr kumimoji="1" lang="en-US" altLang="ja-JP" sz="2400" dirty="0"/>
-          </a:p>
-          <a:p>
-            <a:r>
-              <a:rPr lang="ja-JP" altLang="en-US" sz="2400" dirty="0"/>
-              <a:t>・プレイ時間表示</a:t>
-            </a:r>
-            <a:endParaRPr lang="en-US" altLang="ja-JP" sz="2400" dirty="0"/>
-          </a:p>
-          <a:p>
-            <a:r>
-              <a:rPr lang="ja-JP" altLang="en-US" sz="2400" dirty="0"/>
-              <a:t>・プレイヤーに</a:t>
-            </a:r>
-            <a:r>
-              <a:rPr lang="en-US" altLang="ja-JP" sz="2400" dirty="0"/>
-              <a:t>HP</a:t>
-            </a:r>
-            <a:r>
-              <a:rPr lang="ja-JP" altLang="en-US" sz="2400" dirty="0"/>
-              <a:t>制度</a:t>
-            </a:r>
-            <a:endParaRPr lang="en-US" altLang="ja-JP" sz="2400" dirty="0"/>
-          </a:p>
-          <a:p>
-            <a:endParaRPr lang="en-US" altLang="ja-JP" sz="2400" dirty="0"/>
-          </a:p>
-          <a:p>
-            <a:r>
-              <a:rPr kumimoji="1" lang="ja-JP" altLang="en-US" sz="2400" b="1" dirty="0">
-                <a:solidFill>
-                  <a:srgbClr val="FF0000"/>
-                </a:solidFill>
-              </a:rPr>
-              <a:t>■サンプルにない実装がある</a:t>
-            </a:r>
-            <a:endParaRPr kumimoji="1" lang="en-US" altLang="ja-JP" sz="2400" b="1" dirty="0">
-              <a:solidFill>
-                <a:srgbClr val="FF0000"/>
-              </a:solidFill>
-            </a:endParaRPr>
-          </a:p>
-          <a:p>
-            <a:r>
-              <a:rPr lang="ja-JP" altLang="en-US" sz="2400" dirty="0"/>
-              <a:t>・チャージショット</a:t>
-            </a:r>
-            <a:endParaRPr lang="en-US" altLang="ja-JP" sz="2400" dirty="0"/>
-          </a:p>
-          <a:p>
-            <a:r>
-              <a:rPr kumimoji="1" lang="ja-JP" altLang="en-US" sz="2400" dirty="0"/>
-              <a:t>・ホーミング弾</a:t>
-            </a:r>
-            <a:endParaRPr kumimoji="1" lang="en-US" altLang="ja-JP" sz="2400" dirty="0"/>
-          </a:p>
-          <a:p>
-            <a:r>
-              <a:rPr lang="ja-JP" altLang="en-US" sz="2400" dirty="0"/>
-              <a:t>・貫通弾</a:t>
-            </a:r>
-            <a:endParaRPr lang="en-US" altLang="ja-JP" sz="2400" dirty="0"/>
-          </a:p>
-          <a:p>
-            <a:r>
-              <a:rPr lang="ja-JP" altLang="en-US" sz="2400" dirty="0"/>
-              <a:t>・３</a:t>
-            </a:r>
-            <a:r>
-              <a:rPr lang="en-US" altLang="ja-JP" sz="2400" dirty="0"/>
-              <a:t>Way</a:t>
-            </a:r>
-            <a:r>
-              <a:rPr lang="ja-JP" altLang="en-US" sz="2400" dirty="0"/>
-              <a:t>ショット</a:t>
-            </a:r>
-            <a:endParaRPr kumimoji="1" lang="en-US" altLang="ja-JP" sz="2400" dirty="0"/>
-          </a:p>
-          <a:p>
-            <a:r>
-              <a:rPr lang="ja-JP" altLang="en-US" sz="2400" dirty="0"/>
-              <a:t>・サンプルにない動きをする敵（新種の敵、ボスなど）</a:t>
-            </a:r>
-            <a:endParaRPr lang="en-US" altLang="ja-JP" sz="2400" dirty="0"/>
-          </a:p>
-          <a:p>
-            <a:r>
-              <a:rPr kumimoji="1" lang="ja-JP" altLang="en-US" sz="2400" dirty="0"/>
-              <a:t>・ハイスコアのセーブ（ゲームを終了してもリセットされない）</a:t>
-            </a:r>
-            <a:endParaRPr kumimoji="1" lang="en-US" altLang="ja-JP" sz="2400" dirty="0"/>
-          </a:p>
-          <a:p>
-            <a:r>
-              <a:rPr lang="ja-JP" altLang="en-US" sz="2400" dirty="0"/>
-              <a:t>など</a:t>
+              <a:t>それなりのクオリティでなければ展示させません。</a:t>
             </a:r>
             <a:endParaRPr kumimoji="1" lang="en-US" altLang="ja-JP" sz="2400" dirty="0"/>
           </a:p>
@@ -4475,7 +4402,7 @@
     </p:spTree>
     <p:extLst>
       <p:ext uri="{BB962C8B-B14F-4D97-AF65-F5344CB8AC3E}">
-        <p14:creationId xmlns:p14="http://schemas.microsoft.com/office/powerpoint/2010/main" val="2556909716"/>
+        <p14:creationId xmlns:p14="http://schemas.microsoft.com/office/powerpoint/2010/main" val="1527997996"/>
       </p:ext>
     </p:extLst>
   </p:cSld>

--- a/ゲーム科1年/00_前期/ゲームプログラミングⅡ/05_シューティングゲーム制作.pptx
+++ b/ゲーム科1年/00_前期/ゲームプログラミングⅡ/05_シューティングゲーム制作.pptx
@@ -9,6 +9,7 @@
     <p:sldId id="257" r:id="rId3"/>
     <p:sldId id="259" r:id="rId4"/>
     <p:sldId id="260" r:id="rId5"/>
+    <p:sldId id="261" r:id="rId6"/>
   </p:sldIdLst>
   <p:sldSz cx="12192000" cy="6858000"/>
   <p:notesSz cx="6858000" cy="9144000"/>
@@ -262,7 +263,7 @@
           <a:p>
             <a:fld id="{E9CC885B-4903-4D54-9A93-00025F12DED9}" type="datetimeFigureOut">
               <a:rPr kumimoji="1" lang="ja-JP" altLang="en-US" smtClean="0"/>
-              <a:t>2026/5/20</a:t>
+              <a:t>2026/6/4</a:t>
             </a:fld>
             <a:endParaRPr kumimoji="1" lang="ja-JP" altLang="en-US"/>
           </a:p>
@@ -492,7 +493,7 @@
           <a:p>
             <a:fld id="{E9CC885B-4903-4D54-9A93-00025F12DED9}" type="datetimeFigureOut">
               <a:rPr kumimoji="1" lang="ja-JP" altLang="en-US" smtClean="0"/>
-              <a:t>2026/5/20</a:t>
+              <a:t>2026/6/4</a:t>
             </a:fld>
             <a:endParaRPr kumimoji="1" lang="ja-JP" altLang="en-US"/>
           </a:p>
@@ -732,7 +733,7 @@
           <a:p>
             <a:fld id="{E9CC885B-4903-4D54-9A93-00025F12DED9}" type="datetimeFigureOut">
               <a:rPr kumimoji="1" lang="ja-JP" altLang="en-US" smtClean="0"/>
-              <a:t>2026/5/20</a:t>
+              <a:t>2026/6/4</a:t>
             </a:fld>
             <a:endParaRPr kumimoji="1" lang="ja-JP" altLang="en-US"/>
           </a:p>
@@ -962,7 +963,7 @@
           <a:p>
             <a:fld id="{E9CC885B-4903-4D54-9A93-00025F12DED9}" type="datetimeFigureOut">
               <a:rPr kumimoji="1" lang="ja-JP" altLang="en-US" smtClean="0"/>
-              <a:t>2026/5/20</a:t>
+              <a:t>2026/6/4</a:t>
             </a:fld>
             <a:endParaRPr kumimoji="1" lang="ja-JP" altLang="en-US"/>
           </a:p>
@@ -1237,7 +1238,7 @@
           <a:p>
             <a:fld id="{E9CC885B-4903-4D54-9A93-00025F12DED9}" type="datetimeFigureOut">
               <a:rPr kumimoji="1" lang="ja-JP" altLang="en-US" smtClean="0"/>
-              <a:t>2026/5/20</a:t>
+              <a:t>2026/6/4</a:t>
             </a:fld>
             <a:endParaRPr kumimoji="1" lang="ja-JP" altLang="en-US"/>
           </a:p>
@@ -1566,7 +1567,7 @@
           <a:p>
             <a:fld id="{E9CC885B-4903-4D54-9A93-00025F12DED9}" type="datetimeFigureOut">
               <a:rPr kumimoji="1" lang="ja-JP" altLang="en-US" smtClean="0"/>
-              <a:t>2026/5/20</a:t>
+              <a:t>2026/6/4</a:t>
             </a:fld>
             <a:endParaRPr kumimoji="1" lang="ja-JP" altLang="en-US"/>
           </a:p>
@@ -2042,7 +2043,7 @@
           <a:p>
             <a:fld id="{E9CC885B-4903-4D54-9A93-00025F12DED9}" type="datetimeFigureOut">
               <a:rPr kumimoji="1" lang="ja-JP" altLang="en-US" smtClean="0"/>
-              <a:t>2026/5/20</a:t>
+              <a:t>2026/6/4</a:t>
             </a:fld>
             <a:endParaRPr kumimoji="1" lang="ja-JP" altLang="en-US"/>
           </a:p>
@@ -2183,7 +2184,7 @@
           <a:p>
             <a:fld id="{E9CC885B-4903-4D54-9A93-00025F12DED9}" type="datetimeFigureOut">
               <a:rPr kumimoji="1" lang="ja-JP" altLang="en-US" smtClean="0"/>
-              <a:t>2026/5/20</a:t>
+              <a:t>2026/6/4</a:t>
             </a:fld>
             <a:endParaRPr kumimoji="1" lang="ja-JP" altLang="en-US"/>
           </a:p>
@@ -2296,7 +2297,7 @@
           <a:p>
             <a:fld id="{E9CC885B-4903-4D54-9A93-00025F12DED9}" type="datetimeFigureOut">
               <a:rPr kumimoji="1" lang="ja-JP" altLang="en-US" smtClean="0"/>
-              <a:t>2026/5/20</a:t>
+              <a:t>2026/6/4</a:t>
             </a:fld>
             <a:endParaRPr kumimoji="1" lang="ja-JP" altLang="en-US"/>
           </a:p>
@@ -2639,7 +2640,7 @@
           <a:p>
             <a:fld id="{E9CC885B-4903-4D54-9A93-00025F12DED9}" type="datetimeFigureOut">
               <a:rPr kumimoji="1" lang="ja-JP" altLang="en-US" smtClean="0"/>
-              <a:t>2026/5/20</a:t>
+              <a:t>2026/6/4</a:t>
             </a:fld>
             <a:endParaRPr kumimoji="1" lang="ja-JP" altLang="en-US"/>
           </a:p>
@@ -2927,7 +2928,7 @@
           <a:p>
             <a:fld id="{E9CC885B-4903-4D54-9A93-00025F12DED9}" type="datetimeFigureOut">
               <a:rPr kumimoji="1" lang="ja-JP" altLang="en-US" smtClean="0"/>
-              <a:t>2026/5/20</a:t>
+              <a:t>2026/6/4</a:t>
             </a:fld>
             <a:endParaRPr kumimoji="1" lang="ja-JP" altLang="en-US"/>
           </a:p>
@@ -3200,7 +3201,7 @@
           <a:p>
             <a:fld id="{E9CC885B-4903-4D54-9A93-00025F12DED9}" type="datetimeFigureOut">
               <a:rPr kumimoji="1" lang="ja-JP" altLang="en-US" smtClean="0"/>
-              <a:t>2026/5/20</a:t>
+              <a:t>2026/6/4</a:t>
             </a:fld>
             <a:endParaRPr kumimoji="1" lang="ja-JP" altLang="en-US"/>
           </a:p>
@@ -3667,7 +3668,7 @@
         <p:spPr>
           <a:xfrm>
             <a:off x="567542" y="1216429"/>
-            <a:ext cx="9110186" cy="4154984"/>
+            <a:ext cx="10341293" cy="1569660"/>
           </a:xfrm>
           <a:prstGeom prst="rect">
             <a:avLst/>
@@ -3692,39 +3693,8 @@
           <a:p>
             <a:r>
               <a:rPr kumimoji="1" lang="ja-JP" altLang="en-US" sz="2400" dirty="0"/>
-              <a:t>前期の</a:t>
-            </a:r>
-            <a:r>
-              <a:rPr kumimoji="1" lang="ja-JP" altLang="en-US" sz="2400" b="1" dirty="0">
-                <a:solidFill>
-                  <a:srgbClr val="FF0000"/>
-                </a:solidFill>
-              </a:rPr>
-              <a:t>ゲームプログラミング</a:t>
-            </a:r>
-            <a:r>
-              <a:rPr lang="en-US" altLang="ja-JP" sz="2400" b="1" dirty="0">
-                <a:solidFill>
-                  <a:srgbClr val="FF0000"/>
-                </a:solidFill>
-              </a:rPr>
-              <a:t>Ⅱ</a:t>
-            </a:r>
-            <a:r>
-              <a:rPr kumimoji="1" lang="ja-JP" altLang="en-US" sz="2400" b="1" dirty="0">
-                <a:solidFill>
-                  <a:srgbClr val="FF0000"/>
-                </a:solidFill>
-              </a:rPr>
-              <a:t>の成績となります</a:t>
-            </a:r>
-            <a:r>
-              <a:rPr kumimoji="1" lang="ja-JP" altLang="en-US" sz="2400" dirty="0"/>
-              <a:t>し、</a:t>
-            </a:r>
-            <a:endParaRPr kumimoji="1" lang="en-US" altLang="ja-JP" sz="2400" dirty="0"/>
-          </a:p>
-          <a:p>
+              <a:t>今回作るゲームは</a:t>
+            </a:r>
             <a:r>
               <a:rPr kumimoji="1" lang="ja-JP" altLang="en-US" sz="2400" b="1" dirty="0">
                 <a:solidFill>
@@ -3745,56 +3715,6 @@
               <a:t>しっかり作り上げましょう。</a:t>
             </a:r>
             <a:endParaRPr kumimoji="1" lang="en-US" altLang="ja-JP" sz="2400" dirty="0"/>
-          </a:p>
-          <a:p>
-            <a:endParaRPr lang="en-US" altLang="ja-JP" sz="2400" dirty="0"/>
-          </a:p>
-          <a:p>
-            <a:r>
-              <a:rPr kumimoji="1" lang="ja-JP" altLang="en-US" sz="2400" b="1" dirty="0">
-                <a:solidFill>
-                  <a:srgbClr val="FF0000"/>
-                </a:solidFill>
-              </a:rPr>
-              <a:t>■前提条件</a:t>
-            </a:r>
-            <a:endParaRPr kumimoji="1" lang="en-US" altLang="ja-JP" sz="2400" b="1" dirty="0">
-              <a:solidFill>
-                <a:srgbClr val="FF0000"/>
-              </a:solidFill>
-            </a:endParaRPr>
-          </a:p>
-          <a:p>
-            <a:r>
-              <a:rPr kumimoji="1" lang="ja-JP" altLang="en-US" sz="2400" dirty="0"/>
-              <a:t>・</a:t>
-            </a:r>
-            <a:r>
-              <a:rPr kumimoji="1" lang="en-US" altLang="ja-JP" sz="2400" dirty="0"/>
-              <a:t>Visual Studio</a:t>
-            </a:r>
-            <a:r>
-              <a:rPr kumimoji="1" lang="ja-JP" altLang="en-US" sz="2400" dirty="0"/>
-              <a:t>の「新しいプロジェクト作成」から作ること</a:t>
-            </a:r>
-            <a:endParaRPr kumimoji="1" lang="en-US" altLang="ja-JP" sz="2400" dirty="0"/>
-          </a:p>
-          <a:p>
-            <a:r>
-              <a:rPr lang="ja-JP" altLang="en-US" sz="2400" dirty="0"/>
-              <a:t>　（これまでのコピペから始めないこと）</a:t>
-            </a:r>
-            <a:endParaRPr lang="en-US" altLang="ja-JP" sz="2400" dirty="0"/>
-          </a:p>
-          <a:p>
-            <a:endParaRPr kumimoji="1" lang="en-US" altLang="ja-JP" sz="2400" dirty="0"/>
-          </a:p>
-          <a:p>
-            <a:r>
-              <a:rPr lang="ja-JP" altLang="en-US" sz="2400" dirty="0"/>
-              <a:t>・サンプルをコピペしないこと</a:t>
-            </a:r>
-            <a:endParaRPr lang="en-US" altLang="ja-JP" sz="2400" dirty="0"/>
           </a:p>
         </p:txBody>
       </p:sp>
@@ -4403,6 +4323,173 @@
     <p:extLst>
       <p:ext uri="{BB962C8B-B14F-4D97-AF65-F5344CB8AC3E}">
         <p14:creationId xmlns:p14="http://schemas.microsoft.com/office/powerpoint/2010/main" val="1527997996"/>
+      </p:ext>
+    </p:extLst>
+  </p:cSld>
+  <p:clrMapOvr>
+    <a:masterClrMapping/>
+  </p:clrMapOvr>
+</p:sld>
+</file>
+
+<file path=ppt/slides/slide5.xml><?xml version="1.0" encoding="utf-8"?>
+<p:sld xmlns:a="http://schemas.openxmlformats.org/drawingml/2006/main" xmlns:r="http://schemas.openxmlformats.org/officeDocument/2006/relationships" xmlns:p="http://schemas.openxmlformats.org/presentationml/2006/main">
+  <p:cSld>
+    <p:spTree>
+      <p:nvGrpSpPr>
+        <p:cNvPr id="1" name=""/>
+        <p:cNvGrpSpPr/>
+        <p:nvPr/>
+      </p:nvGrpSpPr>
+      <p:grpSpPr>
+        <a:xfrm>
+          <a:off x="0" y="0"/>
+          <a:ext cx="0" cy="0"/>
+          <a:chOff x="0" y="0"/>
+          <a:chExt cx="0" cy="0"/>
+        </a:xfrm>
+      </p:grpSpPr>
+      <p:sp>
+        <p:nvSpPr>
+          <p:cNvPr id="4" name="テキスト ボックス 3">
+            <a:extLst>
+              <a:ext uri="{FF2B5EF4-FFF2-40B4-BE49-F238E27FC236}">
+                <a16:creationId xmlns:a16="http://schemas.microsoft.com/office/drawing/2014/main" id="{5A13BF46-B8C5-48AA-8308-C9ECFF431A18}"/>
+              </a:ext>
+            </a:extLst>
+          </p:cNvPr>
+          <p:cNvSpPr txBox="1"/>
+          <p:nvPr/>
+        </p:nvSpPr>
+        <p:spPr>
+          <a:xfrm>
+            <a:off x="567542" y="491954"/>
+            <a:ext cx="5109091" cy="584775"/>
+          </a:xfrm>
+          <a:prstGeom prst="rect">
+            <a:avLst/>
+          </a:prstGeom>
+          <a:noFill/>
+        </p:spPr>
+        <p:txBody>
+          <a:bodyPr wrap="none" rtlCol="0">
+            <a:spAutoFit/>
+          </a:bodyPr>
+          <a:lstStyle/>
+          <a:p>
+            <a:r>
+              <a:rPr kumimoji="1" lang="ja-JP" altLang="en-US" sz="3200" b="1" u="sng" dirty="0"/>
+              <a:t>シューティングゲーム制作</a:t>
+            </a:r>
+          </a:p>
+        </p:txBody>
+      </p:sp>
+      <p:sp>
+        <p:nvSpPr>
+          <p:cNvPr id="6" name="テキスト ボックス 5">
+            <a:extLst>
+              <a:ext uri="{FF2B5EF4-FFF2-40B4-BE49-F238E27FC236}">
+                <a16:creationId xmlns:a16="http://schemas.microsoft.com/office/drawing/2014/main" id="{55830AD6-028B-4C4E-80BF-B70DFC1C3A46}"/>
+              </a:ext>
+            </a:extLst>
+          </p:cNvPr>
+          <p:cNvSpPr txBox="1"/>
+          <p:nvPr/>
+        </p:nvSpPr>
+        <p:spPr>
+          <a:xfrm>
+            <a:off x="567542" y="1216429"/>
+            <a:ext cx="8802410" cy="2677656"/>
+          </a:xfrm>
+          <a:prstGeom prst="rect">
+            <a:avLst/>
+          </a:prstGeom>
+          <a:noFill/>
+        </p:spPr>
+        <p:txBody>
+          <a:bodyPr wrap="none" rtlCol="0">
+            <a:spAutoFit/>
+          </a:bodyPr>
+          <a:lstStyle/>
+          <a:p>
+            <a:r>
+              <a:rPr kumimoji="1" lang="ja-JP" altLang="en-US" sz="2400" dirty="0"/>
+              <a:t>また、意欲的に取り組んだ方は</a:t>
+            </a:r>
+            <a:r>
+              <a:rPr kumimoji="1" lang="ja-JP" altLang="en-US" sz="2400" b="1" dirty="0">
+                <a:solidFill>
+                  <a:srgbClr val="FF0000"/>
+                </a:solidFill>
+              </a:rPr>
+              <a:t>ゲームラボ</a:t>
+            </a:r>
+            <a:r>
+              <a:rPr kumimoji="1" lang="ja-JP" altLang="en-US" sz="2400" dirty="0"/>
+              <a:t>にご招待します。</a:t>
+            </a:r>
+            <a:endParaRPr kumimoji="1" lang="en-US" altLang="ja-JP" sz="2400" dirty="0"/>
+          </a:p>
+          <a:p>
+            <a:r>
+              <a:rPr kumimoji="1" lang="ja-JP" altLang="en-US" sz="2400" dirty="0"/>
+              <a:t>ゲームラボは、</a:t>
+            </a:r>
+            <a:endParaRPr kumimoji="1" lang="en-US" altLang="ja-JP" sz="2400" dirty="0"/>
+          </a:p>
+          <a:p>
+            <a:r>
+              <a:rPr lang="ja-JP" altLang="en-US" sz="2400" b="1" dirty="0">
+                <a:solidFill>
+                  <a:srgbClr val="FF0000"/>
+                </a:solidFill>
+              </a:rPr>
+              <a:t>３年生が後輩のために授業を実施</a:t>
+            </a:r>
+            <a:r>
+              <a:rPr lang="ja-JP" altLang="en-US" sz="2400" dirty="0"/>
+              <a:t>してくれたり、</a:t>
+            </a:r>
+            <a:endParaRPr lang="en-US" altLang="ja-JP" sz="2400" dirty="0"/>
+          </a:p>
+          <a:p>
+            <a:r>
+              <a:rPr lang="ja-JP" altLang="en-US" sz="2400" b="1" dirty="0">
+                <a:solidFill>
+                  <a:srgbClr val="FF0000"/>
+                </a:solidFill>
+              </a:rPr>
+              <a:t>先輩と一緒にチーム制作</a:t>
+            </a:r>
+            <a:r>
+              <a:rPr lang="ja-JP" altLang="en-US" sz="2400" dirty="0"/>
+              <a:t>をしたりする場になります。</a:t>
+            </a:r>
+            <a:endParaRPr lang="en-US" altLang="ja-JP" sz="2400" dirty="0"/>
+          </a:p>
+          <a:p>
+            <a:endParaRPr kumimoji="1" lang="en-US" altLang="ja-JP" sz="2400" dirty="0"/>
+          </a:p>
+          <a:p>
+            <a:r>
+              <a:rPr lang="ja-JP" altLang="en-US" sz="2400" dirty="0"/>
+              <a:t>授業では得られない経験ができますので、</a:t>
+            </a:r>
+            <a:endParaRPr lang="en-US" altLang="ja-JP" sz="2400" dirty="0"/>
+          </a:p>
+          <a:p>
+            <a:r>
+              <a:rPr kumimoji="1" lang="ja-JP" altLang="en-US" sz="2400" dirty="0"/>
+              <a:t>ぜひ入部してほしいところです。</a:t>
+            </a:r>
+            <a:endParaRPr kumimoji="1" lang="en-US" altLang="ja-JP" sz="2400" dirty="0"/>
+          </a:p>
+        </p:txBody>
+      </p:sp>
+    </p:spTree>
+    <p:extLst>
+      <p:ext uri="{BB962C8B-B14F-4D97-AF65-F5344CB8AC3E}">
+        <p14:creationId xmlns:p14="http://schemas.microsoft.com/office/powerpoint/2010/main" val="296464907"/>
       </p:ext>
     </p:extLst>
   </p:cSld>

--- a/ゲーム科1年/00_前期/ゲームプログラミングⅡ/05_シューティングゲーム制作.pptx
+++ b/ゲーム科1年/00_前期/ゲームプログラミングⅡ/05_シューティングゲーム制作.pptx
@@ -263,7 +263,7 @@
           <a:p>
             <a:fld id="{E9CC885B-4903-4D54-9A93-00025F12DED9}" type="datetimeFigureOut">
               <a:rPr kumimoji="1" lang="ja-JP" altLang="en-US" smtClean="0"/>
-              <a:t>2026/6/4</a:t>
+              <a:t>2026/6/22</a:t>
             </a:fld>
             <a:endParaRPr kumimoji="1" lang="ja-JP" altLang="en-US"/>
           </a:p>
@@ -493,7 +493,7 @@
           <a:p>
             <a:fld id="{E9CC885B-4903-4D54-9A93-00025F12DED9}" type="datetimeFigureOut">
               <a:rPr kumimoji="1" lang="ja-JP" altLang="en-US" smtClean="0"/>
-              <a:t>2026/6/4</a:t>
+              <a:t>2026/6/22</a:t>
             </a:fld>
             <a:endParaRPr kumimoji="1" lang="ja-JP" altLang="en-US"/>
           </a:p>
@@ -733,7 +733,7 @@
           <a:p>
             <a:fld id="{E9CC885B-4903-4D54-9A93-00025F12DED9}" type="datetimeFigureOut">
               <a:rPr kumimoji="1" lang="ja-JP" altLang="en-US" smtClean="0"/>
-              <a:t>2026/6/4</a:t>
+              <a:t>2026/6/22</a:t>
             </a:fld>
             <a:endParaRPr kumimoji="1" lang="ja-JP" altLang="en-US"/>
           </a:p>
@@ -963,7 +963,7 @@
           <a:p>
             <a:fld id="{E9CC885B-4903-4D54-9A93-00025F12DED9}" type="datetimeFigureOut">
               <a:rPr kumimoji="1" lang="ja-JP" altLang="en-US" smtClean="0"/>
-              <a:t>2026/6/4</a:t>
+              <a:t>2026/6/22</a:t>
             </a:fld>
             <a:endParaRPr kumimoji="1" lang="ja-JP" altLang="en-US"/>
           </a:p>
@@ -1238,7 +1238,7 @@
           <a:p>
             <a:fld id="{E9CC885B-4903-4D54-9A93-00025F12DED9}" type="datetimeFigureOut">
               <a:rPr kumimoji="1" lang="ja-JP" altLang="en-US" smtClean="0"/>
-              <a:t>2026/6/4</a:t>
+              <a:t>2026/6/22</a:t>
             </a:fld>
             <a:endParaRPr kumimoji="1" lang="ja-JP" altLang="en-US"/>
           </a:p>
@@ -1567,7 +1567,7 @@
           <a:p>
             <a:fld id="{E9CC885B-4903-4D54-9A93-00025F12DED9}" type="datetimeFigureOut">
               <a:rPr kumimoji="1" lang="ja-JP" altLang="en-US" smtClean="0"/>
-              <a:t>2026/6/4</a:t>
+              <a:t>2026/6/22</a:t>
             </a:fld>
             <a:endParaRPr kumimoji="1" lang="ja-JP" altLang="en-US"/>
           </a:p>
@@ -2043,7 +2043,7 @@
           <a:p>
             <a:fld id="{E9CC885B-4903-4D54-9A93-00025F12DED9}" type="datetimeFigureOut">
               <a:rPr kumimoji="1" lang="ja-JP" altLang="en-US" smtClean="0"/>
-              <a:t>2026/6/4</a:t>
+              <a:t>2026/6/22</a:t>
             </a:fld>
             <a:endParaRPr kumimoji="1" lang="ja-JP" altLang="en-US"/>
           </a:p>
@@ -2184,7 +2184,7 @@
           <a:p>
             <a:fld id="{E9CC885B-4903-4D54-9A93-00025F12DED9}" type="datetimeFigureOut">
               <a:rPr kumimoji="1" lang="ja-JP" altLang="en-US" smtClean="0"/>
-              <a:t>2026/6/4</a:t>
+              <a:t>2026/6/22</a:t>
             </a:fld>
             <a:endParaRPr kumimoji="1" lang="ja-JP" altLang="en-US"/>
           </a:p>
@@ -2297,7 +2297,7 @@
           <a:p>
             <a:fld id="{E9CC885B-4903-4D54-9A93-00025F12DED9}" type="datetimeFigureOut">
               <a:rPr kumimoji="1" lang="ja-JP" altLang="en-US" smtClean="0"/>
-              <a:t>2026/6/4</a:t>
+              <a:t>2026/6/22</a:t>
             </a:fld>
             <a:endParaRPr kumimoji="1" lang="ja-JP" altLang="en-US"/>
           </a:p>
@@ -2640,7 +2640,7 @@
           <a:p>
             <a:fld id="{E9CC885B-4903-4D54-9A93-00025F12DED9}" type="datetimeFigureOut">
               <a:rPr kumimoji="1" lang="ja-JP" altLang="en-US" smtClean="0"/>
-              <a:t>2026/6/4</a:t>
+              <a:t>2026/6/22</a:t>
             </a:fld>
             <a:endParaRPr kumimoji="1" lang="ja-JP" altLang="en-US"/>
           </a:p>
@@ -2928,7 +2928,7 @@
           <a:p>
             <a:fld id="{E9CC885B-4903-4D54-9A93-00025F12DED9}" type="datetimeFigureOut">
               <a:rPr kumimoji="1" lang="ja-JP" altLang="en-US" smtClean="0"/>
-              <a:t>2026/6/4</a:t>
+              <a:t>2026/6/22</a:t>
             </a:fld>
             <a:endParaRPr kumimoji="1" lang="ja-JP" altLang="en-US"/>
           </a:p>
@@ -3201,7 +3201,7 @@
           <a:p>
             <a:fld id="{E9CC885B-4903-4D54-9A93-00025F12DED9}" type="datetimeFigureOut">
               <a:rPr kumimoji="1" lang="ja-JP" altLang="en-US" smtClean="0"/>
-              <a:t>2026/6/4</a:t>
+              <a:t>2026/6/22</a:t>
             </a:fld>
             <a:endParaRPr kumimoji="1" lang="ja-JP" altLang="en-US"/>
           </a:p>
@@ -3798,7 +3798,7 @@
         <p:spPr>
           <a:xfrm>
             <a:off x="567542" y="1216429"/>
-            <a:ext cx="7127272" cy="3046988"/>
+            <a:ext cx="7127272" cy="2677656"/>
           </a:xfrm>
           <a:prstGeom prst="rect">
             <a:avLst/>
@@ -3853,21 +3853,6 @@
                 <a:srgbClr val="FF0000"/>
               </a:solidFill>
             </a:endParaRPr>
-          </a:p>
-          <a:p>
-            <a:r>
-              <a:rPr lang="ja-JP" altLang="en-US" sz="2400" dirty="0"/>
-              <a:t>・</a:t>
-            </a:r>
-            <a:r>
-              <a:rPr lang="en-US" altLang="ja-JP" sz="2400" dirty="0"/>
-              <a:t>ESC</a:t>
-            </a:r>
-            <a:r>
-              <a:rPr lang="ja-JP" altLang="en-US" sz="2400" dirty="0"/>
-              <a:t>キーで終了する</a:t>
-            </a:r>
-            <a:endParaRPr lang="en-US" altLang="ja-JP" sz="2400" dirty="0"/>
           </a:p>
           <a:p>
             <a:r>

--- a/ゲーム科1年/00_前期/ゲームプログラミングⅡ/05_シューティングゲーム制作.pptx
+++ b/ゲーム科1年/00_前期/ゲームプログラミングⅡ/05_シューティングゲーム制作.pptx
@@ -8,8 +8,6 @@
     <p:sldId id="256" r:id="rId2"/>
     <p:sldId id="257" r:id="rId3"/>
     <p:sldId id="259" r:id="rId4"/>
-    <p:sldId id="260" r:id="rId5"/>
-    <p:sldId id="261" r:id="rId6"/>
   </p:sldIdLst>
   <p:sldSz cx="12192000" cy="6858000"/>
   <p:notesSz cx="6858000" cy="9144000"/>
@@ -263,7 +261,7 @@
           <a:p>
             <a:fld id="{E9CC885B-4903-4D54-9A93-00025F12DED9}" type="datetimeFigureOut">
               <a:rPr kumimoji="1" lang="ja-JP" altLang="en-US" smtClean="0"/>
-              <a:t>2026/6/22</a:t>
+              <a:t>2026/6/24</a:t>
             </a:fld>
             <a:endParaRPr kumimoji="1" lang="ja-JP" altLang="en-US"/>
           </a:p>
@@ -493,7 +491,7 @@
           <a:p>
             <a:fld id="{E9CC885B-4903-4D54-9A93-00025F12DED9}" type="datetimeFigureOut">
               <a:rPr kumimoji="1" lang="ja-JP" altLang="en-US" smtClean="0"/>
-              <a:t>2026/6/22</a:t>
+              <a:t>2026/6/24</a:t>
             </a:fld>
             <a:endParaRPr kumimoji="1" lang="ja-JP" altLang="en-US"/>
           </a:p>
@@ -733,7 +731,7 @@
           <a:p>
             <a:fld id="{E9CC885B-4903-4D54-9A93-00025F12DED9}" type="datetimeFigureOut">
               <a:rPr kumimoji="1" lang="ja-JP" altLang="en-US" smtClean="0"/>
-              <a:t>2026/6/22</a:t>
+              <a:t>2026/6/24</a:t>
             </a:fld>
             <a:endParaRPr kumimoji="1" lang="ja-JP" altLang="en-US"/>
           </a:p>
@@ -963,7 +961,7 @@
           <a:p>
             <a:fld id="{E9CC885B-4903-4D54-9A93-00025F12DED9}" type="datetimeFigureOut">
               <a:rPr kumimoji="1" lang="ja-JP" altLang="en-US" smtClean="0"/>
-              <a:t>2026/6/22</a:t>
+              <a:t>2026/6/24</a:t>
             </a:fld>
             <a:endParaRPr kumimoji="1" lang="ja-JP" altLang="en-US"/>
           </a:p>
@@ -1238,7 +1236,7 @@
           <a:p>
             <a:fld id="{E9CC885B-4903-4D54-9A93-00025F12DED9}" type="datetimeFigureOut">
               <a:rPr kumimoji="1" lang="ja-JP" altLang="en-US" smtClean="0"/>
-              <a:t>2026/6/22</a:t>
+              <a:t>2026/6/24</a:t>
             </a:fld>
             <a:endParaRPr kumimoji="1" lang="ja-JP" altLang="en-US"/>
           </a:p>
@@ -1567,7 +1565,7 @@
           <a:p>
             <a:fld id="{E9CC885B-4903-4D54-9A93-00025F12DED9}" type="datetimeFigureOut">
               <a:rPr kumimoji="1" lang="ja-JP" altLang="en-US" smtClean="0"/>
-              <a:t>2026/6/22</a:t>
+              <a:t>2026/6/24</a:t>
             </a:fld>
             <a:endParaRPr kumimoji="1" lang="ja-JP" altLang="en-US"/>
           </a:p>
@@ -2043,7 +2041,7 @@
           <a:p>
             <a:fld id="{E9CC885B-4903-4D54-9A93-00025F12DED9}" type="datetimeFigureOut">
               <a:rPr kumimoji="1" lang="ja-JP" altLang="en-US" smtClean="0"/>
-              <a:t>2026/6/22</a:t>
+              <a:t>2026/6/24</a:t>
             </a:fld>
             <a:endParaRPr kumimoji="1" lang="ja-JP" altLang="en-US"/>
           </a:p>
@@ -2184,7 +2182,7 @@
           <a:p>
             <a:fld id="{E9CC885B-4903-4D54-9A93-00025F12DED9}" type="datetimeFigureOut">
               <a:rPr kumimoji="1" lang="ja-JP" altLang="en-US" smtClean="0"/>
-              <a:t>2026/6/22</a:t>
+              <a:t>2026/6/24</a:t>
             </a:fld>
             <a:endParaRPr kumimoji="1" lang="ja-JP" altLang="en-US"/>
           </a:p>
@@ -2297,7 +2295,7 @@
           <a:p>
             <a:fld id="{E9CC885B-4903-4D54-9A93-00025F12DED9}" type="datetimeFigureOut">
               <a:rPr kumimoji="1" lang="ja-JP" altLang="en-US" smtClean="0"/>
-              <a:t>2026/6/22</a:t>
+              <a:t>2026/6/24</a:t>
             </a:fld>
             <a:endParaRPr kumimoji="1" lang="ja-JP" altLang="en-US"/>
           </a:p>
@@ -2640,7 +2638,7 @@
           <a:p>
             <a:fld id="{E9CC885B-4903-4D54-9A93-00025F12DED9}" type="datetimeFigureOut">
               <a:rPr kumimoji="1" lang="ja-JP" altLang="en-US" smtClean="0"/>
-              <a:t>2026/6/22</a:t>
+              <a:t>2026/6/24</a:t>
             </a:fld>
             <a:endParaRPr kumimoji="1" lang="ja-JP" altLang="en-US"/>
           </a:p>
@@ -2928,7 +2926,7 @@
           <a:p>
             <a:fld id="{E9CC885B-4903-4D54-9A93-00025F12DED9}" type="datetimeFigureOut">
               <a:rPr kumimoji="1" lang="ja-JP" altLang="en-US" smtClean="0"/>
-              <a:t>2026/6/22</a:t>
+              <a:t>2026/6/24</a:t>
             </a:fld>
             <a:endParaRPr kumimoji="1" lang="ja-JP" altLang="en-US"/>
           </a:p>
@@ -3201,7 +3199,7 @@
           <a:p>
             <a:fld id="{E9CC885B-4903-4D54-9A93-00025F12DED9}" type="datetimeFigureOut">
               <a:rPr kumimoji="1" lang="ja-JP" altLang="en-US" smtClean="0"/>
-              <a:t>2026/6/22</a:t>
+              <a:t>2026/6/24</a:t>
             </a:fld>
             <a:endParaRPr kumimoji="1" lang="ja-JP" altLang="en-US"/>
           </a:p>
@@ -4129,361 +4127,6 @@
 </p:sld>
 </file>
 
-<file path=ppt/slides/slide4.xml><?xml version="1.0" encoding="utf-8"?>
-<p:sld xmlns:a="http://schemas.openxmlformats.org/drawingml/2006/main" xmlns:r="http://schemas.openxmlformats.org/officeDocument/2006/relationships" xmlns:p="http://schemas.openxmlformats.org/presentationml/2006/main">
-  <p:cSld>
-    <p:spTree>
-      <p:nvGrpSpPr>
-        <p:cNvPr id="1" name=""/>
-        <p:cNvGrpSpPr/>
-        <p:nvPr/>
-      </p:nvGrpSpPr>
-      <p:grpSpPr>
-        <a:xfrm>
-          <a:off x="0" y="0"/>
-          <a:ext cx="0" cy="0"/>
-          <a:chOff x="0" y="0"/>
-          <a:chExt cx="0" cy="0"/>
-        </a:xfrm>
-      </p:grpSpPr>
-      <p:sp>
-        <p:nvSpPr>
-          <p:cNvPr id="4" name="テキスト ボックス 3">
-            <a:extLst>
-              <a:ext uri="{FF2B5EF4-FFF2-40B4-BE49-F238E27FC236}">
-                <a16:creationId xmlns:a16="http://schemas.microsoft.com/office/drawing/2014/main" id="{5A13BF46-B8C5-48AA-8308-C9ECFF431A18}"/>
-              </a:ext>
-            </a:extLst>
-          </p:cNvPr>
-          <p:cNvSpPr txBox="1"/>
-          <p:nvPr/>
-        </p:nvSpPr>
-        <p:spPr>
-          <a:xfrm>
-            <a:off x="567542" y="491954"/>
-            <a:ext cx="5109091" cy="584775"/>
-          </a:xfrm>
-          <a:prstGeom prst="rect">
-            <a:avLst/>
-          </a:prstGeom>
-          <a:noFill/>
-        </p:spPr>
-        <p:txBody>
-          <a:bodyPr wrap="none" rtlCol="0">
-            <a:spAutoFit/>
-          </a:bodyPr>
-          <a:lstStyle/>
-          <a:p>
-            <a:r>
-              <a:rPr kumimoji="1" lang="ja-JP" altLang="en-US" sz="3200" b="1" u="sng" dirty="0"/>
-              <a:t>シューティングゲーム制作</a:t>
-            </a:r>
-          </a:p>
-        </p:txBody>
-      </p:sp>
-      <p:sp>
-        <p:nvSpPr>
-          <p:cNvPr id="6" name="テキスト ボックス 5">
-            <a:extLst>
-              <a:ext uri="{FF2B5EF4-FFF2-40B4-BE49-F238E27FC236}">
-                <a16:creationId xmlns:a16="http://schemas.microsoft.com/office/drawing/2014/main" id="{55830AD6-028B-4C4E-80BF-B70DFC1C3A46}"/>
-              </a:ext>
-            </a:extLst>
-          </p:cNvPr>
-          <p:cNvSpPr txBox="1"/>
-          <p:nvPr/>
-        </p:nvSpPr>
-        <p:spPr>
-          <a:xfrm>
-            <a:off x="567542" y="1216429"/>
-            <a:ext cx="10649069" cy="3785652"/>
-          </a:xfrm>
-          <a:prstGeom prst="rect">
-            <a:avLst/>
-          </a:prstGeom>
-          <a:noFill/>
-        </p:spPr>
-        <p:txBody>
-          <a:bodyPr wrap="none" rtlCol="0">
-            <a:spAutoFit/>
-          </a:bodyPr>
-          <a:lstStyle/>
-          <a:p>
-            <a:r>
-              <a:rPr kumimoji="1" lang="ja-JP" altLang="en-US" sz="2400" dirty="0"/>
-              <a:t>８月には</a:t>
-            </a:r>
-            <a:r>
-              <a:rPr kumimoji="1" lang="ja-JP" altLang="en-US" sz="2400" b="1" dirty="0">
-                <a:solidFill>
-                  <a:srgbClr val="FF0000"/>
-                </a:solidFill>
-              </a:rPr>
-              <a:t>九州学生ゲーム大祭</a:t>
-            </a:r>
-            <a:r>
-              <a:rPr kumimoji="1" lang="ja-JP" altLang="en-US" sz="2400" dirty="0"/>
-              <a:t>という、</a:t>
-            </a:r>
-            <a:r>
-              <a:rPr lang="ja-JP" altLang="en-US" sz="2400" dirty="0"/>
-              <a:t>学生作品の展示イベントがあります。</a:t>
-            </a:r>
-            <a:endParaRPr lang="en-US" altLang="ja-JP" sz="2400" dirty="0"/>
-          </a:p>
-          <a:p>
-            <a:r>
-              <a:rPr kumimoji="1" lang="ja-JP" altLang="en-US" sz="2400" dirty="0"/>
-              <a:t>数少ないイベント参加のチャンスですので、</a:t>
-            </a:r>
-            <a:endParaRPr kumimoji="1" lang="en-US" altLang="ja-JP" sz="2400" dirty="0"/>
-          </a:p>
-          <a:p>
-            <a:r>
-              <a:rPr lang="ja-JP" altLang="en-US" sz="2400" dirty="0"/>
-              <a:t>ぜひ展示まで狙ってみましょう。</a:t>
-            </a:r>
-            <a:endParaRPr lang="en-US" altLang="ja-JP" sz="2400" dirty="0"/>
-          </a:p>
-          <a:p>
-            <a:endParaRPr kumimoji="1" lang="en-US" altLang="ja-JP" sz="2400" dirty="0"/>
-          </a:p>
-          <a:p>
-            <a:r>
-              <a:rPr lang="ja-JP" altLang="en-US" sz="2400" dirty="0"/>
-              <a:t>このようなイベントでの展示は、</a:t>
-            </a:r>
-            <a:endParaRPr lang="en-US" altLang="ja-JP" sz="2400" dirty="0"/>
-          </a:p>
-          <a:p>
-            <a:r>
-              <a:rPr kumimoji="1" lang="ja-JP" altLang="en-US" sz="2400" b="1" dirty="0">
-                <a:solidFill>
-                  <a:srgbClr val="FF0000"/>
-                </a:solidFill>
-              </a:rPr>
-              <a:t>将来の就職活動でとても大きなアドバンテージ</a:t>
-            </a:r>
-            <a:r>
-              <a:rPr kumimoji="1" lang="ja-JP" altLang="en-US" sz="2400" dirty="0"/>
-              <a:t>となります。</a:t>
-            </a:r>
-            <a:endParaRPr kumimoji="1" lang="en-US" altLang="ja-JP" sz="2400" dirty="0"/>
-          </a:p>
-          <a:p>
-            <a:endParaRPr lang="en-US" altLang="ja-JP" sz="2400" dirty="0"/>
-          </a:p>
-          <a:p>
-            <a:r>
-              <a:rPr kumimoji="1" lang="ja-JP" altLang="en-US" sz="2400" b="1" dirty="0">
-                <a:solidFill>
-                  <a:srgbClr val="FF0000"/>
-                </a:solidFill>
-              </a:rPr>
-              <a:t>■注意</a:t>
-            </a:r>
-            <a:endParaRPr kumimoji="1" lang="en-US" altLang="ja-JP" sz="2400" b="1" dirty="0">
-              <a:solidFill>
-                <a:srgbClr val="FF0000"/>
-              </a:solidFill>
-            </a:endParaRPr>
-          </a:p>
-          <a:p>
-            <a:r>
-              <a:rPr lang="ja-JP" altLang="en-US" sz="2400" dirty="0"/>
-              <a:t>イベントには他校の学生や企業の方も多数参加されます。</a:t>
-            </a:r>
-            <a:endParaRPr lang="en-US" altLang="ja-JP" sz="2400" dirty="0"/>
-          </a:p>
-          <a:p>
-            <a:r>
-              <a:rPr kumimoji="1" lang="ja-JP" altLang="en-US" sz="2400" dirty="0"/>
-              <a:t>それなりのクオリティでなければ展示させません。</a:t>
-            </a:r>
-            <a:endParaRPr kumimoji="1" lang="en-US" altLang="ja-JP" sz="2400" dirty="0"/>
-          </a:p>
-        </p:txBody>
-      </p:sp>
-    </p:spTree>
-    <p:extLst>
-      <p:ext uri="{BB962C8B-B14F-4D97-AF65-F5344CB8AC3E}">
-        <p14:creationId xmlns:p14="http://schemas.microsoft.com/office/powerpoint/2010/main" val="1527997996"/>
-      </p:ext>
-    </p:extLst>
-  </p:cSld>
-  <p:clrMapOvr>
-    <a:masterClrMapping/>
-  </p:clrMapOvr>
-</p:sld>
-</file>
-
-<file path=ppt/slides/slide5.xml><?xml version="1.0" encoding="utf-8"?>
-<p:sld xmlns:a="http://schemas.openxmlformats.org/drawingml/2006/main" xmlns:r="http://schemas.openxmlformats.org/officeDocument/2006/relationships" xmlns:p="http://schemas.openxmlformats.org/presentationml/2006/main">
-  <p:cSld>
-    <p:spTree>
-      <p:nvGrpSpPr>
-        <p:cNvPr id="1" name=""/>
-        <p:cNvGrpSpPr/>
-        <p:nvPr/>
-      </p:nvGrpSpPr>
-      <p:grpSpPr>
-        <a:xfrm>
-          <a:off x="0" y="0"/>
-          <a:ext cx="0" cy="0"/>
-          <a:chOff x="0" y="0"/>
-          <a:chExt cx="0" cy="0"/>
-        </a:xfrm>
-      </p:grpSpPr>
-      <p:sp>
-        <p:nvSpPr>
-          <p:cNvPr id="4" name="テキスト ボックス 3">
-            <a:extLst>
-              <a:ext uri="{FF2B5EF4-FFF2-40B4-BE49-F238E27FC236}">
-                <a16:creationId xmlns:a16="http://schemas.microsoft.com/office/drawing/2014/main" id="{5A13BF46-B8C5-48AA-8308-C9ECFF431A18}"/>
-              </a:ext>
-            </a:extLst>
-          </p:cNvPr>
-          <p:cNvSpPr txBox="1"/>
-          <p:nvPr/>
-        </p:nvSpPr>
-        <p:spPr>
-          <a:xfrm>
-            <a:off x="567542" y="491954"/>
-            <a:ext cx="5109091" cy="584775"/>
-          </a:xfrm>
-          <a:prstGeom prst="rect">
-            <a:avLst/>
-          </a:prstGeom>
-          <a:noFill/>
-        </p:spPr>
-        <p:txBody>
-          <a:bodyPr wrap="none" rtlCol="0">
-            <a:spAutoFit/>
-          </a:bodyPr>
-          <a:lstStyle/>
-          <a:p>
-            <a:r>
-              <a:rPr kumimoji="1" lang="ja-JP" altLang="en-US" sz="3200" b="1" u="sng" dirty="0"/>
-              <a:t>シューティングゲーム制作</a:t>
-            </a:r>
-          </a:p>
-        </p:txBody>
-      </p:sp>
-      <p:sp>
-        <p:nvSpPr>
-          <p:cNvPr id="6" name="テキスト ボックス 5">
-            <a:extLst>
-              <a:ext uri="{FF2B5EF4-FFF2-40B4-BE49-F238E27FC236}">
-                <a16:creationId xmlns:a16="http://schemas.microsoft.com/office/drawing/2014/main" id="{55830AD6-028B-4C4E-80BF-B70DFC1C3A46}"/>
-              </a:ext>
-            </a:extLst>
-          </p:cNvPr>
-          <p:cNvSpPr txBox="1"/>
-          <p:nvPr/>
-        </p:nvSpPr>
-        <p:spPr>
-          <a:xfrm>
-            <a:off x="567542" y="1216429"/>
-            <a:ext cx="8802410" cy="2677656"/>
-          </a:xfrm>
-          <a:prstGeom prst="rect">
-            <a:avLst/>
-          </a:prstGeom>
-          <a:noFill/>
-        </p:spPr>
-        <p:txBody>
-          <a:bodyPr wrap="none" rtlCol="0">
-            <a:spAutoFit/>
-          </a:bodyPr>
-          <a:lstStyle/>
-          <a:p>
-            <a:r>
-              <a:rPr kumimoji="1" lang="ja-JP" altLang="en-US" sz="2400" dirty="0"/>
-              <a:t>また、意欲的に取り組んだ方は</a:t>
-            </a:r>
-            <a:r>
-              <a:rPr kumimoji="1" lang="ja-JP" altLang="en-US" sz="2400" b="1" dirty="0">
-                <a:solidFill>
-                  <a:srgbClr val="FF0000"/>
-                </a:solidFill>
-              </a:rPr>
-              <a:t>ゲームラボ</a:t>
-            </a:r>
-            <a:r>
-              <a:rPr kumimoji="1" lang="ja-JP" altLang="en-US" sz="2400" dirty="0"/>
-              <a:t>にご招待します。</a:t>
-            </a:r>
-            <a:endParaRPr kumimoji="1" lang="en-US" altLang="ja-JP" sz="2400" dirty="0"/>
-          </a:p>
-          <a:p>
-            <a:r>
-              <a:rPr kumimoji="1" lang="ja-JP" altLang="en-US" sz="2400" dirty="0"/>
-              <a:t>ゲームラボは、</a:t>
-            </a:r>
-            <a:endParaRPr kumimoji="1" lang="en-US" altLang="ja-JP" sz="2400" dirty="0"/>
-          </a:p>
-          <a:p>
-            <a:r>
-              <a:rPr lang="ja-JP" altLang="en-US" sz="2400" b="1" dirty="0">
-                <a:solidFill>
-                  <a:srgbClr val="FF0000"/>
-                </a:solidFill>
-              </a:rPr>
-              <a:t>３年生が後輩のために授業を実施</a:t>
-            </a:r>
-            <a:r>
-              <a:rPr lang="ja-JP" altLang="en-US" sz="2400" dirty="0"/>
-              <a:t>してくれたり、</a:t>
-            </a:r>
-            <a:endParaRPr lang="en-US" altLang="ja-JP" sz="2400" dirty="0"/>
-          </a:p>
-          <a:p>
-            <a:r>
-              <a:rPr lang="ja-JP" altLang="en-US" sz="2400" b="1" dirty="0">
-                <a:solidFill>
-                  <a:srgbClr val="FF0000"/>
-                </a:solidFill>
-              </a:rPr>
-              <a:t>先輩と一緒にチーム制作</a:t>
-            </a:r>
-            <a:r>
-              <a:rPr lang="ja-JP" altLang="en-US" sz="2400" dirty="0"/>
-              <a:t>をしたりする場になります。</a:t>
-            </a:r>
-            <a:endParaRPr lang="en-US" altLang="ja-JP" sz="2400" dirty="0"/>
-          </a:p>
-          <a:p>
-            <a:endParaRPr kumimoji="1" lang="en-US" altLang="ja-JP" sz="2400" dirty="0"/>
-          </a:p>
-          <a:p>
-            <a:r>
-              <a:rPr lang="ja-JP" altLang="en-US" sz="2400" dirty="0"/>
-              <a:t>授業では得られない経験ができますので、</a:t>
-            </a:r>
-            <a:endParaRPr lang="en-US" altLang="ja-JP" sz="2400" dirty="0"/>
-          </a:p>
-          <a:p>
-            <a:r>
-              <a:rPr kumimoji="1" lang="ja-JP" altLang="en-US" sz="2400" dirty="0"/>
-              <a:t>ぜひ入部してほしいところです。</a:t>
-            </a:r>
-            <a:endParaRPr kumimoji="1" lang="en-US" altLang="ja-JP" sz="2400" dirty="0"/>
-          </a:p>
-        </p:txBody>
-      </p:sp>
-    </p:spTree>
-    <p:extLst>
-      <p:ext uri="{BB962C8B-B14F-4D97-AF65-F5344CB8AC3E}">
-        <p14:creationId xmlns:p14="http://schemas.microsoft.com/office/powerpoint/2010/main" val="296464907"/>
-      </p:ext>
-    </p:extLst>
-  </p:cSld>
-  <p:clrMapOvr>
-    <a:masterClrMapping/>
-  </p:clrMapOvr>
-</p:sld>
-</file>
-
 <file path=ppt/theme/theme1.xml><?xml version="1.0" encoding="utf-8"?>
 <a:theme xmlns:a="http://schemas.openxmlformats.org/drawingml/2006/main" name="Office テーマ">
   <a:themeElements>
